--- a/presentations/02-platform-and-design/02-platform-and-design-lab.pptx
+++ b/presentations/02-platform-and-design/02-platform-and-design-lab.pptx
@@ -136,7 +136,7 @@
   <p:extLst>
     <p:ext uri="{521415D9-36F7-43E2-AB2F-B90AF26B5E84}">
       <p14:sectionLst xmlns:p14="http://schemas.microsoft.com/office/powerpoint/2010/main">
-        <p14:section name="Opening" id="{cc2c586c-7562-9820-ca06-a0dfe8b54eff}">
+        <p14:section name="Opening" id="{2fdf947d-82f6-3f26-0c3c-7cad5db8fc7c}">
           <p14:sldIdLst>
             <p14:sldId id="256"/>
             <p14:sldId id="257"/>
@@ -144,7 +144,7 @@
             <p14:sldId id="259"/>
           </p14:sldIdLst>
         </p14:section>
-        <p14:section name="State" id="{e9f53372-c08e-b145-2838-160a1eaf31d6}">
+        <p14:section name="State" id="{ff3ece67-ab27-51a3-0165-ab80f3b66206}">
           <p14:sldIdLst>
             <p14:sldId id="260"/>
             <p14:sldId id="261"/>
@@ -153,7 +153,7 @@
             <p14:sldId id="264"/>
           </p14:sldIdLst>
         </p14:section>
-        <p14:section name="Coordinates and colour" id="{cf60f6e9-eea7-3016-486b-0cedfd8532ce}">
+        <p14:section name="Coordinates and colour" id="{024d213e-af6f-afd8-84e0-3f11f7b82c7c}">
           <p14:sldIdLst>
             <p14:sldId id="265"/>
             <p14:sldId id="266"/>
@@ -162,7 +162,7 @@
             <p14:sldId id="269"/>
           </p14:sldIdLst>
         </p14:section>
-        <p14:section name="Input" id="{f6ed390a-f646-c171-4516-758a857261e7}">
+        <p14:section name="Input" id="{62e80f3c-92fc-e8bf-67eb-8c4ff4896777}">
           <p14:sldIdLst>
             <p14:sldId id="270"/>
             <p14:sldId id="271"/>
@@ -170,7 +170,7 @@
             <p14:sldId id="273"/>
           </p14:sldIdLst>
         </p14:section>
-        <p14:section name="Three functions" id="{1c9512bf-cd2e-78d0-b575-a61befa23811}">
+        <p14:section name="Three functions" id="{f9a95f61-9a2d-78e2-8961-223cf7b4baff}">
           <p14:sldIdLst>
             <p14:sldId id="274"/>
             <p14:sldId id="275"/>
@@ -180,7 +180,7 @@
             <p14:sldId id="279"/>
           </p14:sldIdLst>
         </p14:section>
-        <p14:section name="Review" id="{b98a3050-44da-de17-171e-20bd35f20635}">
+        <p14:section name="Review" id="{d8e45de2-905b-517c-1038-da582f78c0ec}">
           <p14:sldIdLst>
             <p14:sldId id="280"/>
             <p14:sldId id="281"/>
@@ -189,7 +189,7 @@
             <p14:sldId id="284"/>
           </p14:sldIdLst>
         </p14:section>
-        <p14:section name="Closing" id="{3e77c372-c9fc-adba-88c7-9cc88e12b79e}">
+        <p14:section name="Closing" id="{aac62a23-9b2f-e868-baaa-93f61d98948c}">
           <p14:sldIdLst>
             <p14:sldId id="285"/>
           </p14:sldIdLst>
@@ -4888,12 +4888,12 @@
         </p:nvSpPr>
         <p:spPr>
           <a:xfrm>
-            <a:off x="8092440" y="2834640"/>
-            <a:ext cx="3550615" cy="3383280"/>
+            <a:off x="8092440" y="2788920"/>
+            <a:ext cx="3550615" cy="3429000"/>
           </a:xfrm>
           <a:prstGeom prst="roundRect">
             <a:avLst>
-              <a:gd name="adj" fmla="val 2162"/>
+              <a:gd name="adj" fmla="val 2133"/>
             </a:avLst>
           </a:prstGeom>
           <a:solidFill>
@@ -4915,8 +4915,8 @@
         </p:nvSpPr>
         <p:spPr>
           <a:xfrm>
-            <a:off x="8321040" y="2971800"/>
-            <a:ext cx="3093415" cy="365760"/>
+            <a:off x="8321040" y="2880360"/>
+            <a:ext cx="3093415" cy="310896"/>
           </a:xfrm>
           <a:prstGeom prst="rect">
             <a:avLst/>
@@ -4932,7 +4932,7 @@
               <a:buNone/>
             </a:pPr>
             <a:r>
-              <a:rPr lang="en-US" sz="1500" b="1" dirty="0">
+              <a:rPr lang="en-US" sz="1400" b="1" dirty="0">
                 <a:solidFill>
                   <a:srgbClr val="2F7D4F"/>
                 </a:solidFill>
@@ -4942,7 +4942,7 @@
               </a:rPr>
               <a:t>Expected result</a:t>
             </a:r>
-            <a:endParaRPr lang="en-US" sz="1500" dirty="0"/>
+            <a:endParaRPr lang="en-US" sz="1400" dirty="0"/>
           </a:p>
         </p:txBody>
       </p:sp>
@@ -4954,8 +4954,8 @@
         </p:nvSpPr>
         <p:spPr>
           <a:xfrm>
-            <a:off x="8321040" y="3429000"/>
-            <a:ext cx="3093415" cy="2606040"/>
+            <a:off x="8321040" y="3246120"/>
+            <a:ext cx="3093415" cy="2862072"/>
           </a:xfrm>
           <a:prstGeom prst="rect">
             <a:avLst/>
@@ -5556,12 +5556,12 @@
         </p:nvSpPr>
         <p:spPr>
           <a:xfrm>
-            <a:off x="8092440" y="2834640"/>
-            <a:ext cx="3550615" cy="3383280"/>
+            <a:off x="8092440" y="2788920"/>
+            <a:ext cx="3550615" cy="3429000"/>
           </a:xfrm>
           <a:prstGeom prst="roundRect">
             <a:avLst>
-              <a:gd name="adj" fmla="val 2162"/>
+              <a:gd name="adj" fmla="val 2133"/>
             </a:avLst>
           </a:prstGeom>
           <a:solidFill>
@@ -5583,8 +5583,8 @@
         </p:nvSpPr>
         <p:spPr>
           <a:xfrm>
-            <a:off x="8321040" y="2971800"/>
-            <a:ext cx="3093415" cy="365760"/>
+            <a:off x="8321040" y="2880360"/>
+            <a:ext cx="3093415" cy="310896"/>
           </a:xfrm>
           <a:prstGeom prst="rect">
             <a:avLst/>
@@ -5600,7 +5600,7 @@
               <a:buNone/>
             </a:pPr>
             <a:r>
-              <a:rPr lang="en-US" sz="1500" b="1" dirty="0">
+              <a:rPr lang="en-US" sz="1400" b="1" dirty="0">
                 <a:solidFill>
                   <a:srgbClr val="2F7D4F"/>
                 </a:solidFill>
@@ -5610,7 +5610,7 @@
               </a:rPr>
               <a:t>Expected result</a:t>
             </a:r>
-            <a:endParaRPr lang="en-US" sz="1500" dirty="0"/>
+            <a:endParaRPr lang="en-US" sz="1400" dirty="0"/>
           </a:p>
         </p:txBody>
       </p:sp>
@@ -5622,8 +5622,8 @@
         </p:nvSpPr>
         <p:spPr>
           <a:xfrm>
-            <a:off x="8321040" y="3429000"/>
-            <a:ext cx="3093415" cy="2606040"/>
+            <a:off x="8321040" y="3246120"/>
+            <a:ext cx="3093415" cy="2862072"/>
           </a:xfrm>
           <a:prstGeom prst="rect">
             <a:avLst/>
@@ -6946,12 +6946,12 @@
         </p:nvSpPr>
         <p:spPr>
           <a:xfrm>
-            <a:off x="8092440" y="2834640"/>
-            <a:ext cx="3550615" cy="3383280"/>
+            <a:off x="8092440" y="2788920"/>
+            <a:ext cx="3550615" cy="3429000"/>
           </a:xfrm>
           <a:prstGeom prst="roundRect">
             <a:avLst>
-              <a:gd name="adj" fmla="val 2162"/>
+              <a:gd name="adj" fmla="val 2133"/>
             </a:avLst>
           </a:prstGeom>
           <a:solidFill>
@@ -6973,8 +6973,8 @@
         </p:nvSpPr>
         <p:spPr>
           <a:xfrm>
-            <a:off x="8321040" y="2971800"/>
-            <a:ext cx="3093415" cy="365760"/>
+            <a:off x="8321040" y="2880360"/>
+            <a:ext cx="3093415" cy="310896"/>
           </a:xfrm>
           <a:prstGeom prst="rect">
             <a:avLst/>
@@ -6990,7 +6990,7 @@
               <a:buNone/>
             </a:pPr>
             <a:r>
-              <a:rPr lang="en-US" sz="1500" b="1" dirty="0">
+              <a:rPr lang="en-US" sz="1400" b="1" dirty="0">
                 <a:solidFill>
                   <a:srgbClr val="2F7D4F"/>
                 </a:solidFill>
@@ -7000,7 +7000,7 @@
               </a:rPr>
               <a:t>Expected result</a:t>
             </a:r>
-            <a:endParaRPr lang="en-US" sz="1500" dirty="0"/>
+            <a:endParaRPr lang="en-US" sz="1400" dirty="0"/>
           </a:p>
         </p:txBody>
       </p:sp>
@@ -7012,8 +7012,8 @@
         </p:nvSpPr>
         <p:spPr>
           <a:xfrm>
-            <a:off x="8321040" y="3429000"/>
-            <a:ext cx="3093415" cy="2606040"/>
+            <a:off x="8321040" y="3246120"/>
+            <a:ext cx="3093415" cy="2862072"/>
           </a:xfrm>
           <a:prstGeom prst="rect">
             <a:avLst/>
@@ -9391,12 +9391,12 @@
         </p:nvSpPr>
         <p:spPr>
           <a:xfrm>
-            <a:off x="8092440" y="2834640"/>
-            <a:ext cx="3550615" cy="3383280"/>
+            <a:off x="8092440" y="2788920"/>
+            <a:ext cx="3550615" cy="3429000"/>
           </a:xfrm>
           <a:prstGeom prst="roundRect">
             <a:avLst>
-              <a:gd name="adj" fmla="val 2162"/>
+              <a:gd name="adj" fmla="val 2133"/>
             </a:avLst>
           </a:prstGeom>
           <a:solidFill>
@@ -9418,8 +9418,8 @@
         </p:nvSpPr>
         <p:spPr>
           <a:xfrm>
-            <a:off x="8321040" y="2971800"/>
-            <a:ext cx="3093415" cy="365760"/>
+            <a:off x="8321040" y="2880360"/>
+            <a:ext cx="3093415" cy="310896"/>
           </a:xfrm>
           <a:prstGeom prst="rect">
             <a:avLst/>
@@ -9435,7 +9435,7 @@
               <a:buNone/>
             </a:pPr>
             <a:r>
-              <a:rPr lang="en-US" sz="1500" b="1" dirty="0">
+              <a:rPr lang="en-US" sz="1400" b="1" dirty="0">
                 <a:solidFill>
                   <a:srgbClr val="2F7D4F"/>
                 </a:solidFill>
@@ -9445,7 +9445,7 @@
               </a:rPr>
               <a:t>Expected result</a:t>
             </a:r>
-            <a:endParaRPr lang="en-US" sz="1500" dirty="0"/>
+            <a:endParaRPr lang="en-US" sz="1400" dirty="0"/>
           </a:p>
         </p:txBody>
       </p:sp>
@@ -9457,8 +9457,8 @@
         </p:nvSpPr>
         <p:spPr>
           <a:xfrm>
-            <a:off x="8321040" y="3429000"/>
-            <a:ext cx="3093415" cy="2606040"/>
+            <a:off x="8321040" y="3246120"/>
+            <a:ext cx="3093415" cy="2862072"/>
           </a:xfrm>
           <a:prstGeom prst="rect">
             <a:avLst/>
@@ -10059,12 +10059,12 @@
         </p:nvSpPr>
         <p:spPr>
           <a:xfrm>
-            <a:off x="8092440" y="2834640"/>
-            <a:ext cx="3550615" cy="3383280"/>
+            <a:off x="8092440" y="2788920"/>
+            <a:ext cx="3550615" cy="3429000"/>
           </a:xfrm>
           <a:prstGeom prst="roundRect">
             <a:avLst>
-              <a:gd name="adj" fmla="val 2162"/>
+              <a:gd name="adj" fmla="val 2133"/>
             </a:avLst>
           </a:prstGeom>
           <a:solidFill>
@@ -10086,8 +10086,8 @@
         </p:nvSpPr>
         <p:spPr>
           <a:xfrm>
-            <a:off x="8321040" y="2971800"/>
-            <a:ext cx="3093415" cy="365760"/>
+            <a:off x="8321040" y="2880360"/>
+            <a:ext cx="3093415" cy="310896"/>
           </a:xfrm>
           <a:prstGeom prst="rect">
             <a:avLst/>
@@ -10103,7 +10103,7 @@
               <a:buNone/>
             </a:pPr>
             <a:r>
-              <a:rPr lang="en-US" sz="1500" b="1" dirty="0">
+              <a:rPr lang="en-US" sz="1400" b="1" dirty="0">
                 <a:solidFill>
                   <a:srgbClr val="2F7D4F"/>
                 </a:solidFill>
@@ -10113,7 +10113,7 @@
               </a:rPr>
               <a:t>Expected result</a:t>
             </a:r>
-            <a:endParaRPr lang="en-US" sz="1500" dirty="0"/>
+            <a:endParaRPr lang="en-US" sz="1400" dirty="0"/>
           </a:p>
         </p:txBody>
       </p:sp>
@@ -10125,8 +10125,8 @@
         </p:nvSpPr>
         <p:spPr>
           <a:xfrm>
-            <a:off x="8321040" y="3429000"/>
-            <a:ext cx="3093415" cy="2606040"/>
+            <a:off x="8321040" y="3246120"/>
+            <a:ext cx="3093415" cy="2862072"/>
           </a:xfrm>
           <a:prstGeom prst="rect">
             <a:avLst/>
@@ -12218,12 +12218,12 @@
         </p:nvSpPr>
         <p:spPr>
           <a:xfrm>
-            <a:off x="8092440" y="2834640"/>
-            <a:ext cx="3550615" cy="3383280"/>
+            <a:off x="8092440" y="2788920"/>
+            <a:ext cx="3550615" cy="3429000"/>
           </a:xfrm>
           <a:prstGeom prst="roundRect">
             <a:avLst>
-              <a:gd name="adj" fmla="val 2162"/>
+              <a:gd name="adj" fmla="val 2133"/>
             </a:avLst>
           </a:prstGeom>
           <a:solidFill>
@@ -12245,8 +12245,8 @@
         </p:nvSpPr>
         <p:spPr>
           <a:xfrm>
-            <a:off x="8321040" y="2971800"/>
-            <a:ext cx="3093415" cy="365760"/>
+            <a:off x="8321040" y="2880360"/>
+            <a:ext cx="3093415" cy="310896"/>
           </a:xfrm>
           <a:prstGeom prst="rect">
             <a:avLst/>
@@ -12262,7 +12262,7 @@
               <a:buNone/>
             </a:pPr>
             <a:r>
-              <a:rPr lang="en-US" sz="1500" b="1" dirty="0">
+              <a:rPr lang="en-US" sz="1400" b="1" dirty="0">
                 <a:solidFill>
                   <a:srgbClr val="2F7D4F"/>
                 </a:solidFill>
@@ -12272,7 +12272,7 @@
               </a:rPr>
               <a:t>Expected result</a:t>
             </a:r>
-            <a:endParaRPr lang="en-US" sz="1500" dirty="0"/>
+            <a:endParaRPr lang="en-US" sz="1400" dirty="0"/>
           </a:p>
         </p:txBody>
       </p:sp>
@@ -12284,8 +12284,8 @@
         </p:nvSpPr>
         <p:spPr>
           <a:xfrm>
-            <a:off x="8321040" y="3429000"/>
-            <a:ext cx="3093415" cy="2606040"/>
+            <a:off x="8321040" y="3246120"/>
+            <a:ext cx="3093415" cy="2862072"/>
           </a:xfrm>
           <a:prstGeom prst="rect">
             <a:avLst/>
@@ -12886,12 +12886,12 @@
         </p:nvSpPr>
         <p:spPr>
           <a:xfrm>
-            <a:off x="8092440" y="2834640"/>
-            <a:ext cx="3550615" cy="3383280"/>
+            <a:off x="8092440" y="2788920"/>
+            <a:ext cx="3550615" cy="3429000"/>
           </a:xfrm>
           <a:prstGeom prst="roundRect">
             <a:avLst>
-              <a:gd name="adj" fmla="val 2162"/>
+              <a:gd name="adj" fmla="val 2133"/>
             </a:avLst>
           </a:prstGeom>
           <a:solidFill>
@@ -12913,8 +12913,8 @@
         </p:nvSpPr>
         <p:spPr>
           <a:xfrm>
-            <a:off x="8321040" y="2971800"/>
-            <a:ext cx="3093415" cy="365760"/>
+            <a:off x="8321040" y="2880360"/>
+            <a:ext cx="3093415" cy="310896"/>
           </a:xfrm>
           <a:prstGeom prst="rect">
             <a:avLst/>
@@ -12930,7 +12930,7 @@
               <a:buNone/>
             </a:pPr>
             <a:r>
-              <a:rPr lang="en-US" sz="1500" b="1" dirty="0">
+              <a:rPr lang="en-US" sz="1400" b="1" dirty="0">
                 <a:solidFill>
                   <a:srgbClr val="2F7D4F"/>
                 </a:solidFill>
@@ -12940,7 +12940,7 @@
               </a:rPr>
               <a:t>Expected result</a:t>
             </a:r>
-            <a:endParaRPr lang="en-US" sz="1500" dirty="0"/>
+            <a:endParaRPr lang="en-US" sz="1400" dirty="0"/>
           </a:p>
         </p:txBody>
       </p:sp>
@@ -12952,8 +12952,8 @@
         </p:nvSpPr>
         <p:spPr>
           <a:xfrm>
-            <a:off x="8321040" y="3429000"/>
-            <a:ext cx="3093415" cy="2606040"/>
+            <a:off x="8321040" y="3246120"/>
+            <a:ext cx="3093415" cy="2862072"/>
           </a:xfrm>
           <a:prstGeom prst="rect">
             <a:avLst/>
@@ -12969,7 +12969,7 @@
               <a:buNone/>
             </a:pPr>
             <a:r>
-              <a:rPr lang="en-US" sz="1800" dirty="0">
+              <a:rPr lang="en-US" sz="1900" dirty="0">
                 <a:solidFill>
                   <a:srgbClr val="1B2530"/>
                 </a:solidFill>
@@ -12979,7 +12979,7 @@
               </a:rPr>
               <a:t>prg32_sprite_hitbox(ball_x, ball_y, 8, 8, paddle_x, 180, 60, 8). On a hit ball_dy becomes negative. If the ball stays overlapped next frame it flips again: force the direction upward.</a:t>
             </a:r>
-            <a:endParaRPr lang="en-US" sz="1800" dirty="0"/>
+            <a:endParaRPr lang="en-US" sz="1900" dirty="0"/>
           </a:p>
         </p:txBody>
       </p:sp>
@@ -14073,12 +14073,12 @@
         </p:nvSpPr>
         <p:spPr>
           <a:xfrm>
-            <a:off x="8092440" y="2834640"/>
-            <a:ext cx="3550615" cy="3383280"/>
+            <a:off x="8092440" y="2788920"/>
+            <a:ext cx="3550615" cy="3429000"/>
           </a:xfrm>
           <a:prstGeom prst="roundRect">
             <a:avLst>
-              <a:gd name="adj" fmla="val 2162"/>
+              <a:gd name="adj" fmla="val 2133"/>
             </a:avLst>
           </a:prstGeom>
           <a:solidFill>
@@ -14100,8 +14100,8 @@
         </p:nvSpPr>
         <p:spPr>
           <a:xfrm>
-            <a:off x="8321040" y="2971800"/>
-            <a:ext cx="3093415" cy="365760"/>
+            <a:off x="8321040" y="2880360"/>
+            <a:ext cx="3093415" cy="310896"/>
           </a:xfrm>
           <a:prstGeom prst="rect">
             <a:avLst/>
@@ -14117,7 +14117,7 @@
               <a:buNone/>
             </a:pPr>
             <a:r>
-              <a:rPr lang="en-US" sz="1500" b="1" dirty="0">
+              <a:rPr lang="en-US" sz="1400" b="1" dirty="0">
                 <a:solidFill>
                   <a:srgbClr val="2F7D4F"/>
                 </a:solidFill>
@@ -14127,7 +14127,7 @@
               </a:rPr>
               <a:t>Expected result</a:t>
             </a:r>
-            <a:endParaRPr lang="en-US" sz="1500" dirty="0"/>
+            <a:endParaRPr lang="en-US" sz="1400" dirty="0"/>
           </a:p>
         </p:txBody>
       </p:sp>
@@ -14139,8 +14139,8 @@
         </p:nvSpPr>
         <p:spPr>
           <a:xfrm>
-            <a:off x="8321040" y="3429000"/>
-            <a:ext cx="3093415" cy="2606040"/>
+            <a:off x="8321040" y="3246120"/>
+            <a:ext cx="3093415" cy="2862072"/>
           </a:xfrm>
           <a:prstGeom prst="rect">
             <a:avLst/>
@@ -15728,12 +15728,12 @@
         </p:nvSpPr>
         <p:spPr>
           <a:xfrm>
-            <a:off x="8092440" y="2834640"/>
-            <a:ext cx="3550615" cy="3383280"/>
+            <a:off x="8092440" y="2788920"/>
+            <a:ext cx="3550615" cy="3429000"/>
           </a:xfrm>
           <a:prstGeom prst="roundRect">
             <a:avLst>
-              <a:gd name="adj" fmla="val 2162"/>
+              <a:gd name="adj" fmla="val 2133"/>
             </a:avLst>
           </a:prstGeom>
           <a:solidFill>
@@ -15755,8 +15755,8 @@
         </p:nvSpPr>
         <p:spPr>
           <a:xfrm>
-            <a:off x="8321040" y="2971800"/>
-            <a:ext cx="3093415" cy="365760"/>
+            <a:off x="8321040" y="2880360"/>
+            <a:ext cx="3093415" cy="310896"/>
           </a:xfrm>
           <a:prstGeom prst="rect">
             <a:avLst/>
@@ -15772,7 +15772,7 @@
               <a:buNone/>
             </a:pPr>
             <a:r>
-              <a:rPr lang="en-US" sz="1500" b="1" dirty="0">
+              <a:rPr lang="en-US" sz="1400" b="1" dirty="0">
                 <a:solidFill>
                   <a:srgbClr val="2F7D4F"/>
                 </a:solidFill>
@@ -15782,7 +15782,7 @@
               </a:rPr>
               <a:t>Expected result</a:t>
             </a:r>
-            <a:endParaRPr lang="en-US" sz="1500" dirty="0"/>
+            <a:endParaRPr lang="en-US" sz="1400" dirty="0"/>
           </a:p>
         </p:txBody>
       </p:sp>
@@ -15794,8 +15794,8 @@
         </p:nvSpPr>
         <p:spPr>
           <a:xfrm>
-            <a:off x="8321040" y="3429000"/>
-            <a:ext cx="3093415" cy="2606040"/>
+            <a:off x="8321040" y="3246120"/>
+            <a:ext cx="3093415" cy="2862072"/>
           </a:xfrm>
           <a:prstGeom prst="rect">
             <a:avLst/>
@@ -16310,12 +16310,12 @@
         </p:nvSpPr>
         <p:spPr>
           <a:xfrm>
-            <a:off x="8092440" y="2834640"/>
-            <a:ext cx="3550615" cy="3383280"/>
+            <a:off x="8092440" y="2788920"/>
+            <a:ext cx="3550615" cy="3429000"/>
           </a:xfrm>
           <a:prstGeom prst="roundRect">
             <a:avLst>
-              <a:gd name="adj" fmla="val 2162"/>
+              <a:gd name="adj" fmla="val 2133"/>
             </a:avLst>
           </a:prstGeom>
           <a:solidFill>
@@ -16337,8 +16337,8 @@
         </p:nvSpPr>
         <p:spPr>
           <a:xfrm>
-            <a:off x="8321040" y="2971800"/>
-            <a:ext cx="3093415" cy="365760"/>
+            <a:off x="8321040" y="2880360"/>
+            <a:ext cx="3093415" cy="310896"/>
           </a:xfrm>
           <a:prstGeom prst="rect">
             <a:avLst/>
@@ -16354,7 +16354,7 @@
               <a:buNone/>
             </a:pPr>
             <a:r>
-              <a:rPr lang="en-US" sz="1500" b="1" dirty="0">
+              <a:rPr lang="en-US" sz="1400" b="1" dirty="0">
                 <a:solidFill>
                   <a:srgbClr val="2F7D4F"/>
                 </a:solidFill>
@@ -16364,7 +16364,7 @@
               </a:rPr>
               <a:t>Expected result</a:t>
             </a:r>
-            <a:endParaRPr lang="en-US" sz="1500" dirty="0"/>
+            <a:endParaRPr lang="en-US" sz="1400" dirty="0"/>
           </a:p>
         </p:txBody>
       </p:sp>
@@ -16376,8 +16376,8 @@
         </p:nvSpPr>
         <p:spPr>
           <a:xfrm>
-            <a:off x="8321040" y="3429000"/>
-            <a:ext cx="3093415" cy="2606040"/>
+            <a:off x="8321040" y="3246120"/>
+            <a:ext cx="3093415" cy="2862072"/>
           </a:xfrm>
           <a:prstGeom prst="rect">
             <a:avLst/>
@@ -20190,12 +20190,12 @@
         </p:nvSpPr>
         <p:spPr>
           <a:xfrm>
-            <a:off x="8092440" y="2834640"/>
-            <a:ext cx="3550615" cy="3383280"/>
+            <a:off x="8092440" y="2788920"/>
+            <a:ext cx="3550615" cy="3429000"/>
           </a:xfrm>
           <a:prstGeom prst="roundRect">
             <a:avLst>
-              <a:gd name="adj" fmla="val 2162"/>
+              <a:gd name="adj" fmla="val 2133"/>
             </a:avLst>
           </a:prstGeom>
           <a:solidFill>
@@ -20217,8 +20217,8 @@
         </p:nvSpPr>
         <p:spPr>
           <a:xfrm>
-            <a:off x="8321040" y="2971800"/>
-            <a:ext cx="3093415" cy="365760"/>
+            <a:off x="8321040" y="2880360"/>
+            <a:ext cx="3093415" cy="310896"/>
           </a:xfrm>
           <a:prstGeom prst="rect">
             <a:avLst/>
@@ -20234,7 +20234,7 @@
               <a:buNone/>
             </a:pPr>
             <a:r>
-              <a:rPr lang="en-US" sz="1500" b="1" dirty="0">
+              <a:rPr lang="en-US" sz="1400" b="1" dirty="0">
                 <a:solidFill>
                   <a:srgbClr val="2F7D4F"/>
                 </a:solidFill>
@@ -20244,7 +20244,7 @@
               </a:rPr>
               <a:t>Expected result</a:t>
             </a:r>
-            <a:endParaRPr lang="en-US" sz="1500" dirty="0"/>
+            <a:endParaRPr lang="en-US" sz="1400" dirty="0"/>
           </a:p>
         </p:txBody>
       </p:sp>
@@ -20256,8 +20256,8 @@
         </p:nvSpPr>
         <p:spPr>
           <a:xfrm>
-            <a:off x="8321040" y="3429000"/>
-            <a:ext cx="3093415" cy="2606040"/>
+            <a:off x="8321040" y="3246120"/>
+            <a:ext cx="3093415" cy="2862072"/>
           </a:xfrm>
           <a:prstGeom prst="rect">
             <a:avLst/>

--- a/presentations/02-platform-and-design/02-platform-and-design-lab.pptx
+++ b/presentations/02-platform-and-design/02-platform-and-design-lab.pptx
@@ -136,7 +136,7 @@
   <p:extLst>
     <p:ext uri="{521415D9-36F7-43E2-AB2F-B90AF26B5E84}">
       <p14:sectionLst xmlns:p14="http://schemas.microsoft.com/office/powerpoint/2010/main">
-        <p14:section name="Opening" id="{2fdf947d-82f6-3f26-0c3c-7cad5db8fc7c}">
+        <p14:section name="Opening" id="{89427453-7695-d72c-7e95-4f671fa5a48e}">
           <p14:sldIdLst>
             <p14:sldId id="256"/>
             <p14:sldId id="257"/>
@@ -144,7 +144,7 @@
             <p14:sldId id="259"/>
           </p14:sldIdLst>
         </p14:section>
-        <p14:section name="State" id="{ff3ece67-ab27-51a3-0165-ab80f3b66206}">
+        <p14:section name="State" id="{12ea336d-bf73-56d0-a484-67451e01d070}">
           <p14:sldIdLst>
             <p14:sldId id="260"/>
             <p14:sldId id="261"/>
@@ -153,7 +153,7 @@
             <p14:sldId id="264"/>
           </p14:sldIdLst>
         </p14:section>
-        <p14:section name="Coordinates and colour" id="{024d213e-af6f-afd8-84e0-3f11f7b82c7c}">
+        <p14:section name="Coordinates and colour" id="{2927da47-b295-24b8-75de-c2f1ad937ebe}">
           <p14:sldIdLst>
             <p14:sldId id="265"/>
             <p14:sldId id="266"/>
@@ -162,7 +162,7 @@
             <p14:sldId id="269"/>
           </p14:sldIdLst>
         </p14:section>
-        <p14:section name="Input" id="{62e80f3c-92fc-e8bf-67eb-8c4ff4896777}">
+        <p14:section name="Input" id="{f9a7f9b4-02cf-c7ba-2afe-c0ac809a8eca}">
           <p14:sldIdLst>
             <p14:sldId id="270"/>
             <p14:sldId id="271"/>
@@ -170,7 +170,7 @@
             <p14:sldId id="273"/>
           </p14:sldIdLst>
         </p14:section>
-        <p14:section name="Three functions" id="{f9a95f61-9a2d-78e2-8961-223cf7b4baff}">
+        <p14:section name="Three functions" id="{6187417c-4d31-7d0c-f6db-fe6c01667357}">
           <p14:sldIdLst>
             <p14:sldId id="274"/>
             <p14:sldId id="275"/>
@@ -180,7 +180,7 @@
             <p14:sldId id="279"/>
           </p14:sldIdLst>
         </p14:section>
-        <p14:section name="Review" id="{d8e45de2-905b-517c-1038-da582f78c0ec}">
+        <p14:section name="Review" id="{24e30196-3cc2-340a-a199-0cb5c777b786}">
           <p14:sldIdLst>
             <p14:sldId id="280"/>
             <p14:sldId id="281"/>
@@ -189,7 +189,7 @@
             <p14:sldId id="284"/>
           </p14:sldIdLst>
         </p14:section>
-        <p14:section name="Closing" id="{aac62a23-9b2f-e868-baaa-93f61d98948c}">
+        <p14:section name="Closing" id="{3949ca7f-f737-44e7-6aa4-7467ebeadedb}">
           <p14:sldIdLst>
             <p14:sldId id="285"/>
           </p14:sldIdLst>
